--- a/outputs/produkte/mama-ceo/03-praesentationen/saeule-2/06-lektion-2-6.pptx
+++ b/outputs/produkte/mama-ceo/03-praesentationen/saeule-2/06-lektion-2-6.pptx
@@ -4,6 +4,9 @@
   <p:sldMasterIdLst>
     <p:sldMasterId id="2147483648" r:id="rId1"/>
   </p:sldMasterIdLst>
+  <p:notesMasterIdLst>
+    <p:notesMasterId r:id="rId12"/>
+  </p:notesMasterIdLst>
   <p:sldIdLst>
     <p:sldId id="256" r:id="rId2"/>
     <p:sldId id="257" r:id="rId3"/>
@@ -16,10 +19,7 @@
     <p:sldId id="264" r:id="rId10"/>
     <p:sldId id="265" r:id="rId11"/>
   </p:sldIdLst>
-  <p:notesMasterIdLst>
-    <p:notesMasterId r:id="rId12"/>
-  </p:notesMasterIdLst>
-  <p:sldSz cx="9144000" cy="5143500"/>
+  <p:sldSz cx="9144000" cy="5143500" type="screen16x9"/>
   <p:notesSz cx="5143500" cy="9144000"/>
   <p:defaultTextStyle>
     <a:lvl1pPr marL="0" algn="l" defTabSz="914400" rtl="0" eaLnBrk="1" latinLnBrk="0" hangingPunct="1">
@@ -113,6 +113,11 @@
       </a:defRPr>
     </a:lvl9pPr>
   </p:defaultTextStyle>
+  <p:extLst>
+    <p:ext uri="{EFAFB233-063F-42B5-8137-9DF3F51BA10A}">
+      <p15:sldGuideLst xmlns:p15="http://schemas.microsoft.com/office/powerpoint/2012/main"/>
+    </p:ext>
+  </p:extLst>
 </p:presentation>
 </file>
 
@@ -138,234 +143,10 @@
           <a:chExt cx="0" cy="0"/>
         </a:xfrm>
       </p:grpSpPr>
-      <p:sp>
-        <p:nvSpPr>
-          <p:cNvPr id="2" name="Header Placeholder 1"/>
-          <p:cNvSpPr>
-            <a:spLocks noGrp="1"/>
-          </p:cNvSpPr>
-          <p:nvPr>
-            <p:ph type="hdr" sz="quarter"/>
-          </p:nvPr>
-        </p:nvSpPr>
-        <p:spPr>
-          <a:xfrm>
-            <a:off x="0" y="0"/>
-            <a:ext cx="2971800" cy="458788"/>
-          </a:xfrm>
-          <a:prstGeom prst="rect">
-            <a:avLst/>
-          </a:prstGeom>
-        </p:spPr>
-        <p:txBody>
-          <a:bodyPr vert="horz" lIns="91440" tIns="45720" rIns="91440" bIns="45720" rtlCol="0"/>
-          <a:lstStyle>
-            <a:lvl1pPr algn="l">
-              <a:defRPr sz="1200"/>
-            </a:lvl1pPr>
-          </a:lstStyle>
-          <a:p>
-            <a:endParaRPr lang="en-US"/>
-          </a:p>
-        </p:txBody>
-      </p:sp>
-      <p:sp>
-        <p:nvSpPr>
-          <p:cNvPr id="3" name="Date Placeholder 2"/>
-          <p:cNvSpPr>
-            <a:spLocks noGrp="1"/>
-          </p:cNvSpPr>
-          <p:nvPr>
-            <p:ph type="dt" idx="1"/>
-          </p:nvPr>
-        </p:nvSpPr>
-        <p:spPr>
-          <a:xfrm>
-            <a:off x="3884613" y="0"/>
-            <a:ext cx="2971800" cy="458788"/>
-          </a:xfrm>
-          <a:prstGeom prst="rect">
-            <a:avLst/>
-          </a:prstGeom>
-        </p:spPr>
-        <p:txBody>
-          <a:bodyPr vert="horz" lIns="91440" tIns="45720" rIns="91440" bIns="45720" rtlCol="0"/>
-          <a:lstStyle>
-            <a:lvl1pPr algn="r">
-              <a:defRPr sz="1200"/>
-            </a:lvl1pPr>
-          </a:lstStyle>
-          <a:p>
-            <a:fld id="{5282F153-3F37-0F45-9E97-73ACFA13230C}" type="datetimeFigureOut">
-              <a:rPr lang="en-US"/>
-              <a:t>7/23/19</a:t>
-            </a:fld>
-            <a:endParaRPr lang="en-US"/>
-          </a:p>
-        </p:txBody>
-      </p:sp>
-      <p:sp>
-        <p:nvSpPr>
-          <p:cNvPr id="4" name="Slide Image Placeholder 3"/>
-          <p:cNvSpPr>
-            <a:spLocks noGrp="1" noRot="1" noChangeAspect="1"/>
-          </p:cNvSpPr>
-          <p:nvPr>
-            <p:ph type="sldImg" idx="2"/>
-          </p:nvPr>
-        </p:nvSpPr>
-        <p:spPr>
-          <a:xfrm>
-            <a:off x="685800" y="1143000"/>
-            <a:ext cx="5486400" cy="3086100"/>
-          </a:xfrm>
-          <a:prstGeom prst="rect">
-            <a:avLst/>
-          </a:prstGeom>
-          <a:noFill/>
-          <a:ln w="12700">
-            <a:solidFill>
-              <a:prstClr val="black"/>
-            </a:solidFill>
-          </a:ln>
-        </p:spPr>
-        <p:txBody>
-          <a:bodyPr vert="horz" lIns="91440" tIns="45720" rIns="91440" bIns="45720" rtlCol="0" anchor="ctr"/>
-          <a:lstStyle/>
-          <a:p>
-            <a:endParaRPr lang="en-US"/>
-          </a:p>
-        </p:txBody>
-      </p:sp>
-      <p:sp>
-        <p:nvSpPr>
-          <p:cNvPr id="5" name="Notes Placeholder 4"/>
-          <p:cNvSpPr>
-            <a:spLocks noGrp="1"/>
-          </p:cNvSpPr>
-          <p:nvPr>
-            <p:ph type="body" sz="quarter" idx="3"/>
-          </p:nvPr>
-        </p:nvSpPr>
-        <p:spPr>
-          <a:xfrm>
-            <a:off x="685800" y="4400550"/>
-            <a:ext cx="5486400" cy="3600450"/>
-          </a:xfrm>
-          <a:prstGeom prst="rect">
-            <a:avLst/>
-          </a:prstGeom>
-        </p:spPr>
-        <p:txBody>
-          <a:bodyPr vert="horz" lIns="91440" tIns="45720" rIns="91440" bIns="45720" rtlCol="0"/>
-          <a:lstStyle/>
-          <a:p>
-            <a:pPr lvl="0"/>
-            <a:r>
-              <a:rPr lang="en-US"/>
-              <a:t>Click to edit Master text styles</a:t>
-            </a:r>
-          </a:p>
-          <a:p>
-            <a:pPr lvl="1"/>
-            <a:r>
-              <a:rPr lang="en-US"/>
-              <a:t>Second level</a:t>
-            </a:r>
-          </a:p>
-          <a:p>
-            <a:pPr lvl="2"/>
-            <a:r>
-              <a:rPr lang="en-US"/>
-              <a:t>Third level</a:t>
-            </a:r>
-          </a:p>
-          <a:p>
-            <a:pPr lvl="3"/>
-            <a:r>
-              <a:rPr lang="en-US"/>
-              <a:t>Fourth level</a:t>
-            </a:r>
-          </a:p>
-          <a:p>
-            <a:pPr lvl="4"/>
-            <a:r>
-              <a:rPr lang="en-US"/>
-              <a:t>Fifth level</a:t>
-            </a:r>
-          </a:p>
-        </p:txBody>
-      </p:sp>
-      <p:sp>
-        <p:nvSpPr>
-          <p:cNvPr id="6" name="Footer Placeholder 5"/>
-          <p:cNvSpPr>
-            <a:spLocks noGrp="1"/>
-          </p:cNvSpPr>
-          <p:nvPr>
-            <p:ph type="ftr" sz="quarter" idx="4"/>
-          </p:nvPr>
-        </p:nvSpPr>
-        <p:spPr>
-          <a:xfrm>
-            <a:off x="0" y="8685213"/>
-            <a:ext cx="2971800" cy="458787"/>
-          </a:xfrm>
-          <a:prstGeom prst="rect">
-            <a:avLst/>
-          </a:prstGeom>
-        </p:spPr>
-        <p:txBody>
-          <a:bodyPr vert="horz" lIns="91440" tIns="45720" rIns="91440" bIns="45720" rtlCol="0" anchor="b"/>
-          <a:lstStyle>
-            <a:lvl1pPr algn="l">
-              <a:defRPr sz="1200"/>
-            </a:lvl1pPr>
-          </a:lstStyle>
-          <a:p>
-            <a:endParaRPr lang="en-US"/>
-          </a:p>
-        </p:txBody>
-      </p:sp>
-      <p:sp>
-        <p:nvSpPr>
-          <p:cNvPr id="7" name="Slide Number Placeholder 6"/>
-          <p:cNvSpPr>
-            <a:spLocks noGrp="1"/>
-          </p:cNvSpPr>
-          <p:nvPr>
-            <p:ph type="sldNum" sz="quarter" idx="5"/>
-          </p:nvPr>
-        </p:nvSpPr>
-        <p:spPr>
-          <a:xfrm>
-            <a:off x="3884613" y="8685213"/>
-            <a:ext cx="2971800" cy="458787"/>
-          </a:xfrm>
-          <a:prstGeom prst="rect">
-            <a:avLst/>
-          </a:prstGeom>
-        </p:spPr>
-        <p:txBody>
-          <a:bodyPr vert="horz" lIns="91440" tIns="45720" rIns="91440" bIns="45720" rtlCol="0" anchor="b"/>
-          <a:lstStyle>
-            <a:lvl1pPr algn="r">
-              <a:defRPr sz="1200"/>
-            </a:lvl1pPr>
-          </a:lstStyle>
-          <a:p>
-            <a:fld id="{CE5E9CC1-C706-0F49-92D6-E571CC5EEA8F}" type="slidenum">
-              <a:rPr lang="en-US"/>
-              <a:t>‹#›</a:t>
-            </a:fld>
-            <a:endParaRPr lang="en-US"/>
-          </a:p>
-        </p:txBody>
-      </p:sp>
     </p:spTree>
     <p:extLst>
       <p:ext uri="{BB962C8B-B14F-4D97-AF65-F5344CB8AC3E}">
-        <p14:creationId xmlns:p14="http://schemas.microsoft.com/office/powerpoint/2010/main" val="1024086991"/>
+        <p14:creationId xmlns:p14="http://schemas.microsoft.com/office/powerpoint/2010/main" val="3028786639"/>
       </p:ext>
     </p:extLst>
   </p:cSld>
@@ -514,7 +295,6 @@
               <a:t>Intro:
 „Die letzte Lektion von Säule 2. Wir schauen jetzt die 5 häufigsten Blockaden an die ich bei jeder Mentee sehe — damit du gewappnet bist wenn sie kommen. Dein Sonntag-Reset aus Lektion 1.5 ist die Versicherung dagegen — den hast du schon installiert."</a:t>
             </a:r>
-            <a:endParaRPr lang="en-US" dirty="0"/>
           </a:p>
         </p:txBody>
       </p:sp>
@@ -603,7 +383,6 @@
               <a:t>Outro:
 „Live-Call 1 ist Ende Woche 2. Bring dein Hütchen-Inventar (Lektion 2.3) und deinen Wochenrhythmus (Lektion 1.5) mit. 90 Minuten Hot-Seat — wir feilen gemeinsam. Danach startet Säule 3: aus deinem Brain Dump wird eine Notion-Struktur. Bis bald im Live-Call."</a:t>
             </a:r>
-            <a:endParaRPr lang="en-US" dirty="0"/>
           </a:p>
         </p:txBody>
       </p:sp>
@@ -692,7 +471,6 @@
               <a:t>Sprechnotiz:
 „Blockade eins: der Vergleich. Du siehst auf Instagram andere Mamas die scheinen abzuheben — und du fühlst dich zurückgeblieben. Realität: was du auf Insta siehst, ist die Highlight-Reel. Du vergleichst dein Backstage mit deren Bühne. Gegenmittel: 30 Tage Insta-Vergleich-Pause, plus dein Sonntag-Reset zeigt dir DEINE Fortschritte."</a:t>
             </a:r>
-            <a:endParaRPr lang="en-US" dirty="0"/>
           </a:p>
         </p:txBody>
       </p:sp>
@@ -781,7 +559,6 @@
               <a:t>Sprechnotiz:
 „Blockade zwei: das Loslass-Schuldgefühl. Du hast in Lektion 2.3 Rollen gestrichen, in 2.4 Aufgaben aufgehört — und jetzt kommt die Stimme: ‚aber wenn ich das nicht mehr mache, dann bricht alles zusammen'. Realität: nichts bricht zusammen. Nach 2 Wochen merkt's niemand mehr. Trau dich. Wir checken's beim Live-Call 1."</a:t>
             </a:r>
-            <a:endParaRPr lang="en-US" dirty="0"/>
           </a:p>
         </p:txBody>
       </p:sp>
@@ -870,7 +647,6 @@
               <a:t>Sprechnotiz:
 „Blockade drei: dein Wochenrhythmus passt 1 Woche super, dann erodiert er. Ferien kommen, Kind wird krank, Mann ist auf Geschäftsreise. Realität: das ist normal. Das ist KEIN Versagen. Gegenmittel: das Sonntag-Reset — du baust den Rhythmus wöchentlich NEU. Nicht einmal für immer. Wöchentlich frisch. Den hast du in Lektion 1.5 schon installiert."</a:t>
             </a:r>
-            <a:endParaRPr lang="en-US" dirty="0"/>
           </a:p>
         </p:txBody>
       </p:sp>
@@ -959,7 +735,6 @@
               <a:t>Sprechnotiz:
 „Blockade vier: dein Partner zieht nicht mit. Er sieht das Business nicht ernst. Er macht die Familien-Beiträge nicht. Realität: 80% der Partner brauchen Beweise statt Worte. Gegenmittel: zeig ihm konkrete Resultate (erste Kundin, erstes 4-stellig). Plus: bitte um SPEZIFISCHE Hilfe (‚du machst ab Mi den Abend-Einkauf') statt allgemeines ‚mach mehr im Haushalt'."</a:t>
             </a:r>
-            <a:endParaRPr lang="en-US" dirty="0"/>
           </a:p>
         </p:txBody>
       </p:sp>
@@ -1048,7 +823,6 @@
               <a:t>Sprechnotiz:
 „Blockade fünf: der Rückfall. Nach 4 Wochen Mama-CEO bist du plötzlich wieder im Macher-Modus. Machst alles selbst. Vergisst zu delegieren. Realität: das ist Default-Modus deines Gehirns. Gegenmittel: Sonntag-Reset prüft jede Woche ‚bin ich in CEO-Modus oder Macher-Modus' — wenn Macher, sofort Kurskorrektur."</a:t>
             </a:r>
-            <a:endParaRPr lang="en-US" dirty="0"/>
           </a:p>
         </p:txBody>
       </p:sp>
@@ -1137,7 +911,6 @@
               <a:t>Sprechnotiz:
 „Self-Reflection: welche der 5 Blockaden trifft DICH am wahrscheinlichsten? Oder triff dich schon im Programm? Markier sie im Arbeitsblatt. Bring diese Erkenntnis zum Live-Call 1."</a:t>
             </a:r>
-            <a:endParaRPr lang="en-US" dirty="0"/>
           </a:p>
         </p:txBody>
       </p:sp>
@@ -1226,7 +999,6 @@
               <a:t>Sprechnotiz:
 „Hier ist die zentrale Erkenntnis. Alle fünf Blockaden lösen sich mit dem Werkzeug das du in Lektion 1.5 schon installiert hast — dem Sonntag-Reset. Wenn du den Termin jede Woche machst, schützt er dich vor allen fünf. Wenn du ihn auslässt, kommen die Blockaden. So einfach. Falls du den Termin noch NICHT im Kalender hast — geh zurück zu Lektion 1.5 und mach das jetzt."</a:t>
             </a:r>
-            <a:endParaRPr lang="en-US" dirty="0"/>
           </a:p>
         </p:txBody>
       </p:sp>
@@ -1315,7 +1087,6 @@
               <a:t>Sprechnotiz:
 „Du hast jetzt Säule 2 abgeschlossen. Hütchen-Inventar gemacht. 4-Filter angewendet. Haushalt strukturiert. 5 Blockaden erkannt. Sonntag-Reset hast du in L1.5 schon im Kalender. Wenn du parallel auch Säule 1 abgeschlossen hast — dein Wochenrhythmus mit 4 Rollen — bist du bereit für Live-Call 1."</a:t>
             </a:r>
-            <a:endParaRPr lang="en-US" dirty="0"/>
           </a:p>
         </p:txBody>
       </p:sp>
@@ -1388,6 +1159,11 @@
 <file path=ppt/slideMasters/slideMaster1.xml><?xml version="1.0" encoding="utf-8"?>
 <p:sldMaster xmlns:a="http://schemas.openxmlformats.org/drawingml/2006/main" xmlns:r="http://schemas.openxmlformats.org/officeDocument/2006/relationships" xmlns:p="http://schemas.openxmlformats.org/presentationml/2006/main">
   <p:cSld>
+    <p:bg>
+      <p:bgRef idx="1001">
+        <a:schemeClr val="bg1"/>
+      </p:bgRef>
+    </p:bg>
     <p:spTree>
       <p:nvGrpSpPr>
         <p:cNvPr id="1" name=""/>
@@ -1670,6 +1446,7 @@
         <a:solidFill>
           <a:srgbClr val="F1ECDD"/>
         </a:solidFill>
+        <a:effectLst/>
       </p:bgPr>
     </p:bg>
     <p:spTree>
@@ -1714,6 +1491,13 @@
             <a:prstDash val="solid"/>
           </a:ln>
         </p:spPr>
+        <p:txBody>
+          <a:bodyPr/>
+          <a:lstStyle/>
+          <a:p>
+            <a:endParaRPr lang="de-CH"/>
+          </a:p>
+        </p:txBody>
       </p:sp>
       <p:sp>
         <p:nvSpPr>
@@ -1736,11 +1520,11 @@
           <a:bodyPr wrap="square" rtlCol="0" anchor="ctr"/>
           <a:lstStyle/>
           <a:p>
-            <a:pPr indent="0" marL="0">
-              <a:buNone/>
-            </a:pPr>
-            <a:r>
-              <a:rPr lang="en-US" sz="1100" b="1" spc="400" kern="0" dirty="0">
+            <a:pPr marL="0" indent="0">
+              <a:buNone/>
+            </a:pPr>
+            <a:r>
+              <a:rPr lang="en-US" sz="1100" b="1" kern="0" spc="400" dirty="0">
                 <a:solidFill>
                   <a:srgbClr val="DC822E"/>
                 </a:solidFill>
@@ -1780,6 +1564,13 @@
             <a:prstDash val="solid"/>
           </a:ln>
         </p:spPr>
+        <p:txBody>
+          <a:bodyPr/>
+          <a:lstStyle/>
+          <a:p>
+            <a:endParaRPr lang="de-CH"/>
+          </a:p>
+        </p:txBody>
       </p:sp>
       <p:sp>
         <p:nvSpPr>
@@ -1802,7 +1593,7 @@
           <a:bodyPr wrap="square" lIns="0" tIns="0" rIns="0" bIns="0" rtlCol="0" anchor="t"/>
           <a:lstStyle/>
           <a:p>
-            <a:pPr indent="0" marL="0">
+            <a:pPr marL="0" indent="0">
               <a:buNone/>
             </a:pPr>
             <a:r>
@@ -1841,7 +1632,7 @@
           <a:bodyPr wrap="square" lIns="0" tIns="0" rIns="0" bIns="0" rtlCol="0" anchor="t"/>
           <a:lstStyle/>
           <a:p>
-            <a:pPr indent="0" marL="0">
+            <a:pPr marL="0" indent="0">
               <a:buNone/>
             </a:pPr>
             <a:r>
@@ -1858,7 +1649,7 @@
             <a:endParaRPr lang="en-US" sz="1800" dirty="0"/>
           </a:p>
           <a:p>
-            <a:pPr indent="0" marL="0">
+            <a:pPr marL="0" indent="0">
               <a:buNone/>
             </a:pPr>
             <a:r>
@@ -1875,7 +1666,7 @@
             <a:endParaRPr lang="en-US" sz="1800" dirty="0"/>
           </a:p>
           <a:p>
-            <a:pPr indent="0" marL="0">
+            <a:pPr marL="0" indent="0">
               <a:buNone/>
             </a:pPr>
             <a:r>
@@ -1914,7 +1705,7 @@
           <a:bodyPr wrap="square" rtlCol="0" anchor="ctr"/>
           <a:lstStyle/>
           <a:p>
-            <a:pPr indent="0" marL="0">
+            <a:pPr marL="0" indent="0">
               <a:buNone/>
             </a:pPr>
             <a:r>
@@ -1953,7 +1744,7 @@
           <a:bodyPr wrap="square" rtlCol="0" anchor="ctr"/>
           <a:lstStyle/>
           <a:p>
-            <a:pPr algn="r" indent="0" marL="0">
+            <a:pPr marL="0" indent="0" algn="r">
               <a:buNone/>
             </a:pPr>
             <a:r>
@@ -1987,6 +1778,7 @@
         <a:solidFill>
           <a:srgbClr val="FFFFFF"/>
         </a:solidFill>
+        <a:effectLst/>
       </p:bgPr>
     </p:bg>
     <p:spTree>
@@ -2024,7 +1816,7 @@
           <a:bodyPr wrap="square" lIns="0" tIns="0" rIns="0" bIns="0" rtlCol="0" anchor="t"/>
           <a:lstStyle/>
           <a:p>
-            <a:pPr indent="0" marL="0">
+            <a:pPr marL="0" indent="0">
               <a:buNone/>
             </a:pPr>
             <a:r>
@@ -2068,6 +1860,13 @@
             <a:prstDash val="solid"/>
           </a:ln>
         </p:spPr>
+        <p:txBody>
+          <a:bodyPr/>
+          <a:lstStyle/>
+          <a:p>
+            <a:endParaRPr lang="de-CH"/>
+          </a:p>
+        </p:txBody>
       </p:sp>
       <p:sp>
         <p:nvSpPr>
@@ -2095,6 +1894,13 @@
             <a:prstDash val="solid"/>
           </a:ln>
         </p:spPr>
+        <p:txBody>
+          <a:bodyPr/>
+          <a:lstStyle/>
+          <a:p>
+            <a:endParaRPr lang="de-CH"/>
+          </a:p>
+        </p:txBody>
       </p:sp>
       <p:sp>
         <p:nvSpPr>
@@ -2117,11 +1923,11 @@
           <a:bodyPr wrap="square" rtlCol="0" anchor="ctr"/>
           <a:lstStyle/>
           <a:p>
-            <a:pPr indent="0" marL="0">
-              <a:buNone/>
-            </a:pPr>
-            <a:r>
-              <a:rPr lang="en-US" sz="1000" b="1" spc="300" kern="0" dirty="0">
+            <a:pPr marL="0" indent="0">
+              <a:buNone/>
+            </a:pPr>
+            <a:r>
+              <a:rPr lang="en-US" sz="1000" b="1" kern="0" spc="300" dirty="0">
                 <a:solidFill>
                   <a:srgbClr val="0D6168"/>
                 </a:solidFill>
@@ -2156,7 +1962,7 @@
           <a:bodyPr wrap="square" lIns="0" tIns="0" rIns="0" bIns="0" rtlCol="0" anchor="t"/>
           <a:lstStyle/>
           <a:p>
-            <a:pPr indent="0" marL="0">
+            <a:pPr marL="0" indent="0">
               <a:buNone/>
             </a:pPr>
             <a:r>
@@ -2306,6 +2112,13 @@
             <a:prstDash val="solid"/>
           </a:ln>
         </p:spPr>
+        <p:txBody>
+          <a:bodyPr/>
+          <a:lstStyle/>
+          <a:p>
+            <a:endParaRPr lang="de-CH"/>
+          </a:p>
+        </p:txBody>
       </p:sp>
       <p:sp>
         <p:nvSpPr>
@@ -2333,6 +2146,13 @@
             <a:prstDash val="solid"/>
           </a:ln>
         </p:spPr>
+        <p:txBody>
+          <a:bodyPr/>
+          <a:lstStyle/>
+          <a:p>
+            <a:endParaRPr lang="de-CH"/>
+          </a:p>
+        </p:txBody>
       </p:sp>
       <p:sp>
         <p:nvSpPr>
@@ -2355,11 +2175,11 @@
           <a:bodyPr wrap="square" rtlCol="0" anchor="ctr"/>
           <a:lstStyle/>
           <a:p>
-            <a:pPr indent="0" marL="0">
-              <a:buNone/>
-            </a:pPr>
-            <a:r>
-              <a:rPr lang="en-US" sz="1000" b="1" spc="300" kern="0" dirty="0">
+            <a:pPr marL="0" indent="0">
+              <a:buNone/>
+            </a:pPr>
+            <a:r>
+              <a:rPr lang="en-US" sz="1000" b="1" kern="0" spc="300" dirty="0">
                 <a:solidFill>
                   <a:srgbClr val="DC822E"/>
                 </a:solidFill>
@@ -2394,7 +2214,7 @@
           <a:bodyPr wrap="square" lIns="0" tIns="0" rIns="0" bIns="0" rtlCol="0" anchor="t"/>
           <a:lstStyle/>
           <a:p>
-            <a:pPr indent="0" marL="0">
+            <a:pPr marL="0" indent="0">
               <a:buNone/>
             </a:pPr>
             <a:r>
@@ -2518,11 +2338,11 @@
           <a:bodyPr wrap="square" rtlCol="0" anchor="ctr"/>
           <a:lstStyle/>
           <a:p>
-            <a:pPr indent="0" marL="0">
-              <a:buNone/>
-            </a:pPr>
-            <a:r>
-              <a:rPr lang="en-US" sz="900" spc="200" kern="0" dirty="0">
+            <a:pPr marL="0" indent="0">
+              <a:buNone/>
+            </a:pPr>
+            <a:r>
+              <a:rPr lang="en-US" sz="900" kern="0" spc="200" dirty="0">
                 <a:solidFill>
                   <a:srgbClr val="7A8A95"/>
                 </a:solidFill>
@@ -2557,7 +2377,7 @@
           <a:bodyPr wrap="square" rtlCol="0" anchor="ctr"/>
           <a:lstStyle/>
           <a:p>
-            <a:pPr algn="r" indent="0" marL="0">
+            <a:pPr marL="0" indent="0" algn="r">
               <a:buNone/>
             </a:pPr>
             <a:r>
@@ -2591,6 +2411,7 @@
         <a:solidFill>
           <a:srgbClr val="FFFFFF"/>
         </a:solidFill>
+        <a:effectLst/>
       </p:bgPr>
     </p:bg>
     <p:spTree>
@@ -2628,11 +2449,11 @@
           <a:bodyPr wrap="square" rtlCol="0" anchor="ctr"/>
           <a:lstStyle/>
           <a:p>
-            <a:pPr indent="0" marL="0">
-              <a:buNone/>
-            </a:pPr>
-            <a:r>
-              <a:rPr lang="en-US" sz="1100" b="1" spc="400" kern="0" dirty="0">
+            <a:pPr marL="0" indent="0">
+              <a:buNone/>
+            </a:pPr>
+            <a:r>
+              <a:rPr lang="en-US" sz="1100" b="1" kern="0" spc="400" dirty="0">
                 <a:solidFill>
                   <a:srgbClr val="DC822E"/>
                 </a:solidFill>
@@ -2667,7 +2488,7 @@
           <a:bodyPr wrap="square" lIns="0" tIns="0" rIns="0" bIns="0" rtlCol="0" anchor="t"/>
           <a:lstStyle/>
           <a:p>
-            <a:pPr indent="0" marL="0">
+            <a:pPr marL="0" indent="0">
               <a:buNone/>
             </a:pPr>
             <a:r>
@@ -2706,7 +2527,7 @@
           <a:bodyPr wrap="square" lIns="0" tIns="0" rIns="0" bIns="0" rtlCol="0" anchor="t"/>
           <a:lstStyle/>
           <a:p>
-            <a:pPr indent="0" marL="0">
+            <a:pPr marL="0" indent="0">
               <a:buNone/>
             </a:pPr>
             <a:r>
@@ -2745,11 +2566,11 @@
           <a:bodyPr wrap="square" rtlCol="0" anchor="ctr"/>
           <a:lstStyle/>
           <a:p>
-            <a:pPr indent="0" marL="0">
-              <a:buNone/>
-            </a:pPr>
-            <a:r>
-              <a:rPr lang="en-US" sz="1100" b="1" spc="400" kern="0" dirty="0">
+            <a:pPr marL="0" indent="0">
+              <a:buNone/>
+            </a:pPr>
+            <a:r>
+              <a:rPr lang="en-US" sz="1100" b="1" kern="0" spc="400" dirty="0">
                 <a:solidFill>
                   <a:srgbClr val="DC822E"/>
                 </a:solidFill>
@@ -2784,7 +2605,7 @@
           <a:bodyPr wrap="square" lIns="0" tIns="0" rIns="0" bIns="0" rtlCol="0" anchor="t"/>
           <a:lstStyle/>
           <a:p>
-            <a:pPr indent="0" marL="0">
+            <a:pPr marL="0" indent="0">
               <a:buNone/>
             </a:pPr>
             <a:r>
@@ -2801,7 +2622,7 @@
             <a:endParaRPr lang="en-US" sz="1400" dirty="0"/>
           </a:p>
           <a:p>
-            <a:pPr indent="0" marL="0">
+            <a:pPr marL="0" indent="0">
               <a:buNone/>
             </a:pPr>
             <a:r>
@@ -2840,11 +2661,11 @@
           <a:bodyPr wrap="square" rtlCol="0" anchor="ctr"/>
           <a:lstStyle/>
           <a:p>
-            <a:pPr indent="0" marL="0">
-              <a:buNone/>
-            </a:pPr>
-            <a:r>
-              <a:rPr lang="en-US" sz="1100" b="1" spc="400" kern="0" dirty="0">
+            <a:pPr marL="0" indent="0">
+              <a:buNone/>
+            </a:pPr>
+            <a:r>
+              <a:rPr lang="en-US" sz="1100" b="1" kern="0" spc="400" dirty="0">
                 <a:solidFill>
                   <a:srgbClr val="DC822E"/>
                 </a:solidFill>
@@ -2879,7 +2700,7 @@
           <a:bodyPr wrap="square" lIns="0" tIns="0" rIns="0" bIns="0" rtlCol="0" anchor="t"/>
           <a:lstStyle/>
           <a:p>
-            <a:pPr indent="0" marL="0">
+            <a:pPr marL="0" indent="0">
               <a:buNone/>
             </a:pPr>
             <a:r>
@@ -2918,11 +2739,11 @@
           <a:bodyPr wrap="square" rtlCol="0" anchor="ctr"/>
           <a:lstStyle/>
           <a:p>
-            <a:pPr indent="0" marL="0">
-              <a:buNone/>
-            </a:pPr>
-            <a:r>
-              <a:rPr lang="en-US" sz="900" spc="200" kern="0" dirty="0">
+            <a:pPr marL="0" indent="0">
+              <a:buNone/>
+            </a:pPr>
+            <a:r>
+              <a:rPr lang="en-US" sz="900" kern="0" spc="200" dirty="0">
                 <a:solidFill>
                   <a:srgbClr val="7A8A95"/>
                 </a:solidFill>
@@ -2957,7 +2778,7 @@
           <a:bodyPr wrap="square" rtlCol="0" anchor="ctr"/>
           <a:lstStyle/>
           <a:p>
-            <a:pPr algn="r" indent="0" marL="0">
+            <a:pPr marL="0" indent="0" algn="r">
               <a:buNone/>
             </a:pPr>
             <a:r>
@@ -2991,6 +2812,7 @@
         <a:solidFill>
           <a:srgbClr val="FFFFFF"/>
         </a:solidFill>
+        <a:effectLst/>
       </p:bgPr>
     </p:bg>
     <p:spTree>
@@ -3028,11 +2850,11 @@
           <a:bodyPr wrap="square" rtlCol="0" anchor="ctr"/>
           <a:lstStyle/>
           <a:p>
-            <a:pPr indent="0" marL="0">
-              <a:buNone/>
-            </a:pPr>
-            <a:r>
-              <a:rPr lang="en-US" sz="1100" b="1" spc="400" kern="0" dirty="0">
+            <a:pPr marL="0" indent="0">
+              <a:buNone/>
+            </a:pPr>
+            <a:r>
+              <a:rPr lang="en-US" sz="1100" b="1" kern="0" spc="400" dirty="0">
                 <a:solidFill>
                   <a:srgbClr val="DC822E"/>
                 </a:solidFill>
@@ -3067,7 +2889,7 @@
           <a:bodyPr wrap="square" lIns="0" tIns="0" rIns="0" bIns="0" rtlCol="0" anchor="t"/>
           <a:lstStyle/>
           <a:p>
-            <a:pPr indent="0" marL="0">
+            <a:pPr marL="0" indent="0">
               <a:buNone/>
             </a:pPr>
             <a:r>
@@ -3106,7 +2928,7 @@
           <a:bodyPr wrap="square" lIns="0" tIns="0" rIns="0" bIns="0" rtlCol="0" anchor="t"/>
           <a:lstStyle/>
           <a:p>
-            <a:pPr indent="0" marL="0">
+            <a:pPr marL="0" indent="0">
               <a:buNone/>
             </a:pPr>
             <a:r>
@@ -3145,11 +2967,11 @@
           <a:bodyPr wrap="square" rtlCol="0" anchor="ctr"/>
           <a:lstStyle/>
           <a:p>
-            <a:pPr indent="0" marL="0">
-              <a:buNone/>
-            </a:pPr>
-            <a:r>
-              <a:rPr lang="en-US" sz="1100" b="1" spc="400" kern="0" dirty="0">
+            <a:pPr marL="0" indent="0">
+              <a:buNone/>
+            </a:pPr>
+            <a:r>
+              <a:rPr lang="en-US" sz="1100" b="1" kern="0" spc="400" dirty="0">
                 <a:solidFill>
                   <a:srgbClr val="DC822E"/>
                 </a:solidFill>
@@ -3184,7 +3006,7 @@
           <a:bodyPr wrap="square" lIns="0" tIns="0" rIns="0" bIns="0" rtlCol="0" anchor="t"/>
           <a:lstStyle/>
           <a:p>
-            <a:pPr indent="0" marL="0">
+            <a:pPr marL="0" indent="0">
               <a:buNone/>
             </a:pPr>
             <a:r>
@@ -3201,7 +3023,7 @@
             <a:endParaRPr lang="en-US" sz="1400" dirty="0"/>
           </a:p>
           <a:p>
-            <a:pPr indent="0" marL="0">
+            <a:pPr marL="0" indent="0">
               <a:buNone/>
             </a:pPr>
             <a:r>
@@ -3240,11 +3062,11 @@
           <a:bodyPr wrap="square" rtlCol="0" anchor="ctr"/>
           <a:lstStyle/>
           <a:p>
-            <a:pPr indent="0" marL="0">
-              <a:buNone/>
-            </a:pPr>
-            <a:r>
-              <a:rPr lang="en-US" sz="1100" b="1" spc="400" kern="0" dirty="0">
+            <a:pPr marL="0" indent="0">
+              <a:buNone/>
+            </a:pPr>
+            <a:r>
+              <a:rPr lang="en-US" sz="1100" b="1" kern="0" spc="400" dirty="0">
                 <a:solidFill>
                   <a:srgbClr val="DC822E"/>
                 </a:solidFill>
@@ -3279,7 +3101,7 @@
           <a:bodyPr wrap="square" lIns="0" tIns="0" rIns="0" bIns="0" rtlCol="0" anchor="t"/>
           <a:lstStyle/>
           <a:p>
-            <a:pPr indent="0" marL="0">
+            <a:pPr marL="0" indent="0">
               <a:buNone/>
             </a:pPr>
             <a:r>
@@ -3318,11 +3140,11 @@
           <a:bodyPr wrap="square" rtlCol="0" anchor="ctr"/>
           <a:lstStyle/>
           <a:p>
-            <a:pPr indent="0" marL="0">
-              <a:buNone/>
-            </a:pPr>
-            <a:r>
-              <a:rPr lang="en-US" sz="900" spc="200" kern="0" dirty="0">
+            <a:pPr marL="0" indent="0">
+              <a:buNone/>
+            </a:pPr>
+            <a:r>
+              <a:rPr lang="en-US" sz="900" kern="0" spc="200" dirty="0">
                 <a:solidFill>
                   <a:srgbClr val="7A8A95"/>
                 </a:solidFill>
@@ -3357,7 +3179,7 @@
           <a:bodyPr wrap="square" rtlCol="0" anchor="ctr"/>
           <a:lstStyle/>
           <a:p>
-            <a:pPr algn="r" indent="0" marL="0">
+            <a:pPr marL="0" indent="0" algn="r">
               <a:buNone/>
             </a:pPr>
             <a:r>
@@ -3391,6 +3213,7 @@
         <a:solidFill>
           <a:srgbClr val="FFFFFF"/>
         </a:solidFill>
+        <a:effectLst/>
       </p:bgPr>
     </p:bg>
     <p:spTree>
@@ -3428,11 +3251,11 @@
           <a:bodyPr wrap="square" rtlCol="0" anchor="ctr"/>
           <a:lstStyle/>
           <a:p>
-            <a:pPr indent="0" marL="0">
-              <a:buNone/>
-            </a:pPr>
-            <a:r>
-              <a:rPr lang="en-US" sz="1100" b="1" spc="400" kern="0" dirty="0">
+            <a:pPr marL="0" indent="0">
+              <a:buNone/>
+            </a:pPr>
+            <a:r>
+              <a:rPr lang="en-US" sz="1100" b="1" kern="0" spc="400" dirty="0">
                 <a:solidFill>
                   <a:srgbClr val="DC822E"/>
                 </a:solidFill>
@@ -3467,7 +3290,7 @@
           <a:bodyPr wrap="square" lIns="0" tIns="0" rIns="0" bIns="0" rtlCol="0" anchor="t"/>
           <a:lstStyle/>
           <a:p>
-            <a:pPr indent="0" marL="0">
+            <a:pPr marL="0" indent="0">
               <a:buNone/>
             </a:pPr>
             <a:r>
@@ -3506,7 +3329,7 @@
           <a:bodyPr wrap="square" lIns="0" tIns="0" rIns="0" bIns="0" rtlCol="0" anchor="t"/>
           <a:lstStyle/>
           <a:p>
-            <a:pPr indent="0" marL="0">
+            <a:pPr marL="0" indent="0">
               <a:buNone/>
             </a:pPr>
             <a:r>
@@ -3545,11 +3368,11 @@
           <a:bodyPr wrap="square" rtlCol="0" anchor="ctr"/>
           <a:lstStyle/>
           <a:p>
-            <a:pPr indent="0" marL="0">
-              <a:buNone/>
-            </a:pPr>
-            <a:r>
-              <a:rPr lang="en-US" sz="1100" b="1" spc="400" kern="0" dirty="0">
+            <a:pPr marL="0" indent="0">
+              <a:buNone/>
+            </a:pPr>
+            <a:r>
+              <a:rPr lang="en-US" sz="1100" b="1" kern="0" spc="400" dirty="0">
                 <a:solidFill>
                   <a:srgbClr val="DC822E"/>
                 </a:solidFill>
@@ -3584,7 +3407,7 @@
           <a:bodyPr wrap="square" lIns="0" tIns="0" rIns="0" bIns="0" rtlCol="0" anchor="t"/>
           <a:lstStyle/>
           <a:p>
-            <a:pPr indent="0" marL="0">
+            <a:pPr marL="0" indent="0">
               <a:buNone/>
             </a:pPr>
             <a:r>
@@ -3601,7 +3424,7 @@
             <a:endParaRPr lang="en-US" sz="1400" dirty="0"/>
           </a:p>
           <a:p>
-            <a:pPr indent="0" marL="0">
+            <a:pPr marL="0" indent="0">
               <a:buNone/>
             </a:pPr>
             <a:r>
@@ -3640,11 +3463,11 @@
           <a:bodyPr wrap="square" rtlCol="0" anchor="ctr"/>
           <a:lstStyle/>
           <a:p>
-            <a:pPr indent="0" marL="0">
-              <a:buNone/>
-            </a:pPr>
-            <a:r>
-              <a:rPr lang="en-US" sz="1100" b="1" spc="400" kern="0" dirty="0">
+            <a:pPr marL="0" indent="0">
+              <a:buNone/>
+            </a:pPr>
+            <a:r>
+              <a:rPr lang="en-US" sz="1100" b="1" kern="0" spc="400" dirty="0">
                 <a:solidFill>
                   <a:srgbClr val="DC822E"/>
                 </a:solidFill>
@@ -3679,7 +3502,7 @@
           <a:bodyPr wrap="square" lIns="0" tIns="0" rIns="0" bIns="0" rtlCol="0" anchor="t"/>
           <a:lstStyle/>
           <a:p>
-            <a:pPr indent="0" marL="0">
+            <a:pPr marL="0" indent="0">
               <a:buNone/>
             </a:pPr>
             <a:r>
@@ -3696,7 +3519,7 @@
             <a:endParaRPr lang="en-US" sz="1400" dirty="0"/>
           </a:p>
           <a:p>
-            <a:pPr indent="0" marL="0">
+            <a:pPr marL="0" indent="0">
               <a:buNone/>
             </a:pPr>
             <a:r>
@@ -3735,11 +3558,11 @@
           <a:bodyPr wrap="square" rtlCol="0" anchor="ctr"/>
           <a:lstStyle/>
           <a:p>
-            <a:pPr indent="0" marL="0">
-              <a:buNone/>
-            </a:pPr>
-            <a:r>
-              <a:rPr lang="en-US" sz="900" spc="200" kern="0" dirty="0">
+            <a:pPr marL="0" indent="0">
+              <a:buNone/>
+            </a:pPr>
+            <a:r>
+              <a:rPr lang="en-US" sz="900" kern="0" spc="200" dirty="0">
                 <a:solidFill>
                   <a:srgbClr val="7A8A95"/>
                 </a:solidFill>
@@ -3774,7 +3597,7 @@
           <a:bodyPr wrap="square" rtlCol="0" anchor="ctr"/>
           <a:lstStyle/>
           <a:p>
-            <a:pPr algn="r" indent="0" marL="0">
+            <a:pPr marL="0" indent="0" algn="r">
               <a:buNone/>
             </a:pPr>
             <a:r>
@@ -3808,6 +3631,7 @@
         <a:solidFill>
           <a:srgbClr val="FFFFFF"/>
         </a:solidFill>
+        <a:effectLst/>
       </p:bgPr>
     </p:bg>
     <p:spTree>
@@ -3845,11 +3669,11 @@
           <a:bodyPr wrap="square" rtlCol="0" anchor="ctr"/>
           <a:lstStyle/>
           <a:p>
-            <a:pPr indent="0" marL="0">
-              <a:buNone/>
-            </a:pPr>
-            <a:r>
-              <a:rPr lang="en-US" sz="1100" b="1" spc="400" kern="0" dirty="0">
+            <a:pPr marL="0" indent="0">
+              <a:buNone/>
+            </a:pPr>
+            <a:r>
+              <a:rPr lang="en-US" sz="1100" b="1" kern="0" spc="400" dirty="0">
                 <a:solidFill>
                   <a:srgbClr val="DC822E"/>
                 </a:solidFill>
@@ -3884,7 +3708,7 @@
           <a:bodyPr wrap="square" lIns="0" tIns="0" rIns="0" bIns="0" rtlCol="0" anchor="t"/>
           <a:lstStyle/>
           <a:p>
-            <a:pPr indent="0" marL="0">
+            <a:pPr marL="0" indent="0">
               <a:buNone/>
             </a:pPr>
             <a:r>
@@ -3923,7 +3747,7 @@
           <a:bodyPr wrap="square" lIns="0" tIns="0" rIns="0" bIns="0" rtlCol="0" anchor="t"/>
           <a:lstStyle/>
           <a:p>
-            <a:pPr indent="0" marL="0">
+            <a:pPr marL="0" indent="0">
               <a:buNone/>
             </a:pPr>
             <a:r>
@@ -3962,11 +3786,11 @@
           <a:bodyPr wrap="square" rtlCol="0" anchor="ctr"/>
           <a:lstStyle/>
           <a:p>
-            <a:pPr indent="0" marL="0">
-              <a:buNone/>
-            </a:pPr>
-            <a:r>
-              <a:rPr lang="en-US" sz="1100" b="1" spc="400" kern="0" dirty="0">
+            <a:pPr marL="0" indent="0">
+              <a:buNone/>
+            </a:pPr>
+            <a:r>
+              <a:rPr lang="en-US" sz="1100" b="1" kern="0" spc="400" dirty="0">
                 <a:solidFill>
                   <a:srgbClr val="DC822E"/>
                 </a:solidFill>
@@ -4001,7 +3825,7 @@
           <a:bodyPr wrap="square" lIns="0" tIns="0" rIns="0" bIns="0" rtlCol="0" anchor="t"/>
           <a:lstStyle/>
           <a:p>
-            <a:pPr indent="0" marL="0">
+            <a:pPr marL="0" indent="0">
               <a:buNone/>
             </a:pPr>
             <a:r>
@@ -4040,11 +3864,11 @@
           <a:bodyPr wrap="square" rtlCol="0" anchor="ctr"/>
           <a:lstStyle/>
           <a:p>
-            <a:pPr indent="0" marL="0">
-              <a:buNone/>
-            </a:pPr>
-            <a:r>
-              <a:rPr lang="en-US" sz="1100" b="1" spc="400" kern="0" dirty="0">
+            <a:pPr marL="0" indent="0">
+              <a:buNone/>
+            </a:pPr>
+            <a:r>
+              <a:rPr lang="en-US" sz="1100" b="1" kern="0" spc="400" dirty="0">
                 <a:solidFill>
                   <a:srgbClr val="DC822E"/>
                 </a:solidFill>
@@ -4079,7 +3903,7 @@
           <a:bodyPr wrap="square" lIns="0" tIns="0" rIns="0" bIns="0" rtlCol="0" anchor="t"/>
           <a:lstStyle/>
           <a:p>
-            <a:pPr indent="0" marL="0">
+            <a:pPr marL="0" indent="0">
               <a:buNone/>
             </a:pPr>
             <a:r>
@@ -4096,7 +3920,7 @@
             <a:endParaRPr lang="en-US" sz="1400" dirty="0"/>
           </a:p>
           <a:p>
-            <a:pPr indent="0" marL="0">
+            <a:pPr marL="0" indent="0">
               <a:buNone/>
             </a:pPr>
             <a:r>
@@ -4135,11 +3959,11 @@
           <a:bodyPr wrap="square" rtlCol="0" anchor="ctr"/>
           <a:lstStyle/>
           <a:p>
-            <a:pPr indent="0" marL="0">
-              <a:buNone/>
-            </a:pPr>
-            <a:r>
-              <a:rPr lang="en-US" sz="900" spc="200" kern="0" dirty="0">
+            <a:pPr marL="0" indent="0">
+              <a:buNone/>
+            </a:pPr>
+            <a:r>
+              <a:rPr lang="en-US" sz="900" kern="0" spc="200" dirty="0">
                 <a:solidFill>
                   <a:srgbClr val="7A8A95"/>
                 </a:solidFill>
@@ -4174,7 +3998,7 @@
           <a:bodyPr wrap="square" rtlCol="0" anchor="ctr"/>
           <a:lstStyle/>
           <a:p>
-            <a:pPr algn="r" indent="0" marL="0">
+            <a:pPr marL="0" indent="0" algn="r">
               <a:buNone/>
             </a:pPr>
             <a:r>
@@ -4208,6 +4032,7 @@
         <a:solidFill>
           <a:srgbClr val="FFFFFF"/>
         </a:solidFill>
+        <a:effectLst/>
       </p:bgPr>
     </p:bg>
     <p:spTree>
@@ -4245,11 +4070,11 @@
           <a:bodyPr wrap="square" rtlCol="0" anchor="ctr"/>
           <a:lstStyle/>
           <a:p>
-            <a:pPr indent="0" marL="0">
-              <a:buNone/>
-            </a:pPr>
-            <a:r>
-              <a:rPr lang="en-US" sz="1100" b="1" spc="400" kern="0" dirty="0">
+            <a:pPr marL="0" indent="0">
+              <a:buNone/>
+            </a:pPr>
+            <a:r>
+              <a:rPr lang="en-US" sz="1100" b="1" kern="0" spc="400" dirty="0">
                 <a:solidFill>
                   <a:srgbClr val="DC822E"/>
                 </a:solidFill>
@@ -4284,7 +4109,7 @@
           <a:bodyPr wrap="square" lIns="0" tIns="0" rIns="0" bIns="0" rtlCol="0" anchor="t"/>
           <a:lstStyle/>
           <a:p>
-            <a:pPr indent="0" marL="0">
+            <a:pPr marL="0" indent="0">
               <a:buNone/>
             </a:pPr>
             <a:r>
@@ -4323,7 +4148,7 @@
           <a:bodyPr wrap="square" lIns="0" tIns="0" rIns="0" bIns="0" rtlCol="0" anchor="t"/>
           <a:lstStyle/>
           <a:p>
-            <a:pPr indent="0" marL="0">
+            <a:pPr marL="0" indent="0">
               <a:buNone/>
             </a:pPr>
             <a:r>
@@ -4362,11 +4187,11 @@
           <a:bodyPr wrap="square" rtlCol="0" anchor="ctr"/>
           <a:lstStyle/>
           <a:p>
-            <a:pPr indent="0" marL="0">
-              <a:buNone/>
-            </a:pPr>
-            <a:r>
-              <a:rPr lang="en-US" sz="1100" b="1" spc="400" kern="0" dirty="0">
+            <a:pPr marL="0" indent="0">
+              <a:buNone/>
+            </a:pPr>
+            <a:r>
+              <a:rPr lang="en-US" sz="1100" b="1" kern="0" spc="400" dirty="0">
                 <a:solidFill>
                   <a:srgbClr val="DC822E"/>
                 </a:solidFill>
@@ -4401,7 +4226,7 @@
           <a:bodyPr wrap="square" lIns="0" tIns="0" rIns="0" bIns="0" rtlCol="0" anchor="t"/>
           <a:lstStyle/>
           <a:p>
-            <a:pPr indent="0" marL="0">
+            <a:pPr marL="0" indent="0">
               <a:buNone/>
             </a:pPr>
             <a:r>
@@ -4413,7 +4238,29 @@
                 <a:ea typeface="Calibri" pitchFamily="34" charset="-122"/>
                 <a:cs typeface="Calibri" pitchFamily="34" charset="-120"/>
               </a:rPr>
-              <a:t>Das ist der Default-Modus deines Gehirns.</a:t>
+              <a:t>Das ist der </a:t>
+            </a:r>
+            <a:r>
+              <a:rPr lang="en-US" sz="1400" dirty="0" err="1">
+                <a:solidFill>
+                  <a:srgbClr val="2C3E50"/>
+                </a:solidFill>
+                <a:latin typeface="Calibri" pitchFamily="34" charset="0"/>
+                <a:ea typeface="Calibri" pitchFamily="34" charset="-122"/>
+                <a:cs typeface="Calibri" pitchFamily="34" charset="-120"/>
+              </a:rPr>
+              <a:t>Rückfall</a:t>
+            </a:r>
+            <a:r>
+              <a:rPr lang="en-US" sz="1400" dirty="0">
+                <a:solidFill>
+                  <a:srgbClr val="2C3E50"/>
+                </a:solidFill>
+                <a:latin typeface="Calibri" pitchFamily="34" charset="0"/>
+                <a:ea typeface="Calibri" pitchFamily="34" charset="-122"/>
+                <a:cs typeface="Calibri" pitchFamily="34" charset="-120"/>
+              </a:rPr>
+              <a:t>-Modus deines Gehirns.</a:t>
             </a:r>
             <a:endParaRPr lang="en-US" sz="1400" dirty="0"/>
           </a:p>
@@ -4440,11 +4287,11 @@
           <a:bodyPr wrap="square" rtlCol="0" anchor="ctr"/>
           <a:lstStyle/>
           <a:p>
-            <a:pPr indent="0" marL="0">
-              <a:buNone/>
-            </a:pPr>
-            <a:r>
-              <a:rPr lang="en-US" sz="1100" b="1" spc="400" kern="0" dirty="0">
+            <a:pPr marL="0" indent="0">
+              <a:buNone/>
+            </a:pPr>
+            <a:r>
+              <a:rPr lang="en-US" sz="1100" b="1" kern="0" spc="400" dirty="0">
                 <a:solidFill>
                   <a:srgbClr val="DC822E"/>
                 </a:solidFill>
@@ -4479,7 +4326,7 @@
           <a:bodyPr wrap="square" lIns="0" tIns="0" rIns="0" bIns="0" rtlCol="0" anchor="t"/>
           <a:lstStyle/>
           <a:p>
-            <a:pPr indent="0" marL="0">
+            <a:pPr marL="0" indent="0">
               <a:buNone/>
             </a:pPr>
             <a:r>
@@ -4496,7 +4343,7 @@
             <a:endParaRPr lang="en-US" sz="1400" dirty="0"/>
           </a:p>
           <a:p>
-            <a:pPr indent="0" marL="0">
+            <a:pPr marL="0" indent="0">
               <a:buNone/>
             </a:pPr>
             <a:r>
@@ -4513,7 +4360,7 @@
             <a:endParaRPr lang="en-US" sz="1400" dirty="0"/>
           </a:p>
           <a:p>
-            <a:pPr indent="0" marL="0">
+            <a:pPr marL="0" indent="0">
               <a:buNone/>
             </a:pPr>
             <a:r>
@@ -4552,11 +4399,11 @@
           <a:bodyPr wrap="square" rtlCol="0" anchor="ctr"/>
           <a:lstStyle/>
           <a:p>
-            <a:pPr indent="0" marL="0">
-              <a:buNone/>
-            </a:pPr>
-            <a:r>
-              <a:rPr lang="en-US" sz="900" spc="200" kern="0" dirty="0">
+            <a:pPr marL="0" indent="0">
+              <a:buNone/>
+            </a:pPr>
+            <a:r>
+              <a:rPr lang="en-US" sz="900" kern="0" spc="200" dirty="0">
                 <a:solidFill>
                   <a:srgbClr val="7A8A95"/>
                 </a:solidFill>
@@ -4591,7 +4438,7 @@
           <a:bodyPr wrap="square" rtlCol="0" anchor="ctr"/>
           <a:lstStyle/>
           <a:p>
-            <a:pPr algn="r" indent="0" marL="0">
+            <a:pPr marL="0" indent="0" algn="r">
               <a:buNone/>
             </a:pPr>
             <a:r>
@@ -4625,6 +4472,7 @@
         <a:solidFill>
           <a:srgbClr val="12828C"/>
         </a:solidFill>
+        <a:effectLst/>
       </p:bgPr>
     </p:bg>
     <p:spTree>
@@ -4649,7 +4497,7 @@
         </p:nvSpPr>
         <p:spPr>
           <a:xfrm>
-            <a:off x="548640" y="1188720"/>
+            <a:off x="548640" y="308187"/>
             <a:ext cx="8046720" cy="365760"/>
           </a:xfrm>
           <a:prstGeom prst="rect">
@@ -4662,11 +4510,11 @@
           <a:bodyPr wrap="square" rtlCol="0" anchor="ctr"/>
           <a:lstStyle/>
           <a:p>
-            <a:pPr algn="ctr" indent="0" marL="0">
-              <a:buNone/>
-            </a:pPr>
-            <a:r>
-              <a:rPr lang="en-US" sz="1100" b="1" spc="400" kern="0" dirty="0">
+            <a:pPr marL="0" indent="0" algn="ctr">
+              <a:buNone/>
+            </a:pPr>
+            <a:r>
+              <a:rPr lang="en-US" sz="1100" b="1" kern="0" spc="400" dirty="0">
                 <a:solidFill>
                   <a:srgbClr val="DC822E"/>
                 </a:solidFill>
@@ -4688,7 +4536,7 @@
         </p:nvSpPr>
         <p:spPr>
           <a:xfrm>
-            <a:off x="4297680" y="1691640"/>
+            <a:off x="4236720" y="655659"/>
             <a:ext cx="548640" cy="36576"/>
           </a:xfrm>
           <a:prstGeom prst="rect">
@@ -4706,6 +4554,13 @@
             <a:prstDash val="solid"/>
           </a:ln>
         </p:spPr>
+        <p:txBody>
+          <a:bodyPr/>
+          <a:lstStyle/>
+          <a:p>
+            <a:endParaRPr lang="de-CH"/>
+          </a:p>
+        </p:txBody>
       </p:sp>
       <p:sp>
         <p:nvSpPr>
@@ -4728,11 +4583,11 @@
           <a:bodyPr wrap="square" lIns="0" tIns="0" rIns="0" bIns="0" rtlCol="0" anchor="ctr"/>
           <a:lstStyle/>
           <a:p>
-            <a:pPr algn="ctr" indent="0" marL="0">
-              <a:buNone/>
-            </a:pPr>
-            <a:r>
-              <a:rPr lang="en-US" sz="3600" b="1" dirty="0">
+            <a:pPr marL="0" indent="0" algn="ctr">
+              <a:buNone/>
+            </a:pPr>
+            <a:r>
+              <a:rPr lang="en-US" sz="2800" b="1" dirty="0">
                 <a:solidFill>
                   <a:srgbClr val="F1ECDD"/>
                 </a:solidFill>
@@ -4742,14 +4597,14 @@
               </a:rPr>
               <a:t>Welche der 5 Blockaden trifft DICH am wahrscheinlichsten?</a:t>
             </a:r>
-            <a:endParaRPr lang="en-US" sz="3600" dirty="0"/>
-          </a:p>
-          <a:p>
-            <a:pPr algn="ctr" indent="0" marL="0">
-              <a:buNone/>
-            </a:pPr>
-            <a:r>
-              <a:rPr lang="en-US" sz="3600" b="1" dirty="0">
+            <a:endParaRPr lang="en-US" sz="2800" dirty="0"/>
+          </a:p>
+          <a:p>
+            <a:pPr marL="0" indent="0" algn="ctr">
+              <a:buNone/>
+            </a:pPr>
+            <a:r>
+              <a:rPr lang="en-US" sz="2800" b="1" dirty="0">
                 <a:solidFill>
                   <a:srgbClr val="F1ECDD"/>
                 </a:solidFill>
@@ -4759,14 +4614,14 @@
               </a:rPr>
               <a:t>(Oder welche trifft dich schon im Programm?)</a:t>
             </a:r>
-            <a:endParaRPr lang="en-US" sz="3600" dirty="0"/>
-          </a:p>
-          <a:p>
-            <a:pPr algn="ctr" indent="0" marL="0">
-              <a:buNone/>
-            </a:pPr>
-            <a:r>
-              <a:rPr lang="en-US" sz="3600" b="1" dirty="0">
+            <a:endParaRPr lang="en-US" sz="2800" dirty="0"/>
+          </a:p>
+          <a:p>
+            <a:pPr marL="0" indent="0" algn="ctr">
+              <a:buNone/>
+            </a:pPr>
+            <a:r>
+              <a:rPr lang="en-US" sz="2800" b="1" dirty="0">
                 <a:solidFill>
                   <a:srgbClr val="F1ECDD"/>
                 </a:solidFill>
@@ -4776,14 +4631,14 @@
               </a:rPr>
               <a:t>Markier sie im Arbeitsblatt.</a:t>
             </a:r>
-            <a:endParaRPr lang="en-US" sz="3600" dirty="0"/>
-          </a:p>
-          <a:p>
-            <a:pPr algn="ctr" indent="0" marL="0">
-              <a:buNone/>
-            </a:pPr>
-            <a:r>
-              <a:rPr lang="en-US" sz="3600" b="1" dirty="0">
+            <a:endParaRPr lang="en-US" sz="2800" dirty="0"/>
+          </a:p>
+          <a:p>
+            <a:pPr marL="0" indent="0" algn="ctr">
+              <a:buNone/>
+            </a:pPr>
+            <a:r>
+              <a:rPr lang="en-US" sz="2800" b="1" dirty="0">
                 <a:solidFill>
                   <a:srgbClr val="F1ECDD"/>
                 </a:solidFill>
@@ -4793,7 +4648,7 @@
               </a:rPr>
               <a:t>Bring diese Erkenntnis zum Live-Call 1.</a:t>
             </a:r>
-            <a:endParaRPr lang="en-US" sz="3600" dirty="0"/>
+            <a:endParaRPr lang="en-US" sz="2800" dirty="0"/>
           </a:p>
         </p:txBody>
       </p:sp>
@@ -4818,11 +4673,11 @@
           <a:bodyPr wrap="square" rtlCol="0" anchor="ctr"/>
           <a:lstStyle/>
           <a:p>
-            <a:pPr indent="0" marL="0">
-              <a:buNone/>
-            </a:pPr>
-            <a:r>
-              <a:rPr lang="en-US" sz="900" spc="200" kern="0" dirty="0">
+            <a:pPr marL="0" indent="0">
+              <a:buNone/>
+            </a:pPr>
+            <a:r>
+              <a:rPr lang="en-US" sz="900" kern="0" spc="200" dirty="0">
                 <a:solidFill>
                   <a:srgbClr val="F1ECDD"/>
                 </a:solidFill>
@@ -4857,7 +4712,7 @@
           <a:bodyPr wrap="square" rtlCol="0" anchor="ctr"/>
           <a:lstStyle/>
           <a:p>
-            <a:pPr algn="r" indent="0" marL="0">
+            <a:pPr marL="0" indent="0" algn="r">
               <a:buNone/>
             </a:pPr>
             <a:r>
@@ -4891,6 +4746,7 @@
         <a:solidFill>
           <a:srgbClr val="12828C"/>
         </a:solidFill>
+        <a:effectLst/>
       </p:bgPr>
     </p:bg>
     <p:spTree>
@@ -4915,7 +4771,7 @@
         </p:nvSpPr>
         <p:spPr>
           <a:xfrm>
-            <a:off x="548640" y="1188720"/>
+            <a:off x="548640" y="416560"/>
             <a:ext cx="8046720" cy="365760"/>
           </a:xfrm>
           <a:prstGeom prst="rect">
@@ -4928,11 +4784,11 @@
           <a:bodyPr wrap="square" rtlCol="0" anchor="ctr"/>
           <a:lstStyle/>
           <a:p>
-            <a:pPr algn="ctr" indent="0" marL="0">
-              <a:buNone/>
-            </a:pPr>
-            <a:r>
-              <a:rPr lang="en-US" sz="1100" b="1" spc="400" kern="0" dirty="0">
+            <a:pPr marL="0" indent="0" algn="ctr">
+              <a:buNone/>
+            </a:pPr>
+            <a:r>
+              <a:rPr lang="en-US" sz="1100" b="1" kern="0" spc="400" dirty="0">
                 <a:solidFill>
                   <a:srgbClr val="DC822E"/>
                 </a:solidFill>
@@ -4954,7 +4810,7 @@
         </p:nvSpPr>
         <p:spPr>
           <a:xfrm>
-            <a:off x="4297680" y="1691640"/>
+            <a:off x="4297680" y="782320"/>
             <a:ext cx="548640" cy="36576"/>
           </a:xfrm>
           <a:prstGeom prst="rect">
@@ -4972,6 +4828,13 @@
             <a:prstDash val="solid"/>
           </a:ln>
         </p:spPr>
+        <p:txBody>
+          <a:bodyPr/>
+          <a:lstStyle/>
+          <a:p>
+            <a:endParaRPr lang="de-CH"/>
+          </a:p>
+        </p:txBody>
       </p:sp>
       <p:sp>
         <p:nvSpPr>
@@ -4981,7 +4844,7 @@
         </p:nvSpPr>
         <p:spPr>
           <a:xfrm>
-            <a:off x="548640" y="2011680"/>
+            <a:off x="548640" y="1659975"/>
             <a:ext cx="8046720" cy="2286000"/>
           </a:xfrm>
           <a:prstGeom prst="rect">
@@ -4994,11 +4857,11 @@
           <a:bodyPr wrap="square" lIns="0" tIns="0" rIns="0" bIns="0" rtlCol="0" anchor="ctr"/>
           <a:lstStyle/>
           <a:p>
-            <a:pPr algn="ctr" indent="0" marL="0">
-              <a:buNone/>
-            </a:pPr>
-            <a:r>
-              <a:rPr lang="en-US" sz="3600" b="1" dirty="0">
+            <a:pPr marL="0" indent="0" algn="ctr">
+              <a:buNone/>
+            </a:pPr>
+            <a:r>
+              <a:rPr lang="en-US" sz="3200" b="1" dirty="0">
                 <a:solidFill>
                   <a:srgbClr val="F1ECDD"/>
                 </a:solidFill>
@@ -5008,14 +4871,14 @@
               </a:rPr>
               <a:t>Dein Sonntag-Reset aus Lektion 1.5</a:t>
             </a:r>
-            <a:endParaRPr lang="en-US" sz="3600" dirty="0"/>
-          </a:p>
-          <a:p>
-            <a:pPr algn="ctr" indent="0" marL="0">
-              <a:buNone/>
-            </a:pPr>
-            <a:r>
-              <a:rPr lang="en-US" sz="3600" b="1" dirty="0">
+            <a:endParaRPr lang="en-US" sz="3200" dirty="0"/>
+          </a:p>
+          <a:p>
+            <a:pPr marL="0" indent="0" algn="ctr">
+              <a:buNone/>
+            </a:pPr>
+            <a:r>
+              <a:rPr lang="en-US" sz="3200" b="1" dirty="0">
                 <a:solidFill>
                   <a:srgbClr val="F1ECDD"/>
                 </a:solidFill>
@@ -5025,14 +4888,14 @@
               </a:rPr>
               <a:t>ist die Versicherung gegen alle 5 Blockaden.</a:t>
             </a:r>
-            <a:endParaRPr lang="en-US" sz="3600" dirty="0"/>
-          </a:p>
-          <a:p>
-            <a:pPr algn="ctr" indent="0" marL="0">
-              <a:buNone/>
-            </a:pPr>
-            <a:r>
-              <a:rPr lang="en-US" sz="3600" b="1" dirty="0">
+            <a:endParaRPr lang="en-US" sz="3200" dirty="0"/>
+          </a:p>
+          <a:p>
+            <a:pPr marL="0" indent="0" algn="ctr">
+              <a:buNone/>
+            </a:pPr>
+            <a:r>
+              <a:rPr lang="en-US" sz="3200" b="1" dirty="0">
                 <a:solidFill>
                   <a:srgbClr val="F1ECDD"/>
                 </a:solidFill>
@@ -5042,14 +4905,14 @@
               </a:rPr>
               <a:t>Du hast den Termin schon im Kalender.</a:t>
             </a:r>
-            <a:endParaRPr lang="en-US" sz="3600" dirty="0"/>
-          </a:p>
-          <a:p>
-            <a:pPr algn="ctr" indent="0" marL="0">
-              <a:buNone/>
-            </a:pPr>
-            <a:r>
-              <a:rPr lang="en-US" sz="3600" b="1" dirty="0">
+            <a:endParaRPr lang="en-US" sz="3200" dirty="0"/>
+          </a:p>
+          <a:p>
+            <a:pPr marL="0" indent="0" algn="ctr">
+              <a:buNone/>
+            </a:pPr>
+            <a:r>
+              <a:rPr lang="en-US" sz="3200" b="1" dirty="0">
                 <a:solidFill>
                   <a:srgbClr val="F1ECDD"/>
                 </a:solidFill>
@@ -5059,7 +4922,7 @@
               </a:rPr>
               <a:t>Nutze ihn — JEDE Woche.</a:t>
             </a:r>
-            <a:endParaRPr lang="en-US" sz="3600" dirty="0"/>
+            <a:endParaRPr lang="en-US" sz="3200" dirty="0"/>
           </a:p>
         </p:txBody>
       </p:sp>
@@ -5084,11 +4947,11 @@
           <a:bodyPr wrap="square" rtlCol="0" anchor="ctr"/>
           <a:lstStyle/>
           <a:p>
-            <a:pPr indent="0" marL="0">
-              <a:buNone/>
-            </a:pPr>
-            <a:r>
-              <a:rPr lang="en-US" sz="900" spc="200" kern="0" dirty="0">
+            <a:pPr marL="0" indent="0">
+              <a:buNone/>
+            </a:pPr>
+            <a:r>
+              <a:rPr lang="en-US" sz="900" kern="0" spc="200" dirty="0">
                 <a:solidFill>
                   <a:srgbClr val="F1ECDD"/>
                 </a:solidFill>
@@ -5123,7 +4986,7 @@
           <a:bodyPr wrap="square" rtlCol="0" anchor="ctr"/>
           <a:lstStyle/>
           <a:p>
-            <a:pPr algn="r" indent="0" marL="0">
+            <a:pPr marL="0" indent="0" algn="r">
               <a:buNone/>
             </a:pPr>
             <a:r>
@@ -5157,6 +5020,7 @@
         <a:solidFill>
           <a:srgbClr val="12828C"/>
         </a:solidFill>
+        <a:effectLst/>
       </p:bgPr>
     </p:bg>
     <p:spTree>
@@ -5194,11 +5058,11 @@
           <a:bodyPr wrap="square" rtlCol="0" anchor="ctr"/>
           <a:lstStyle/>
           <a:p>
-            <a:pPr indent="0" marL="0">
-              <a:buNone/>
-            </a:pPr>
-            <a:r>
-              <a:rPr lang="en-US" sz="1100" b="1" spc="400" kern="0" dirty="0">
+            <a:pPr marL="0" indent="0">
+              <a:buNone/>
+            </a:pPr>
+            <a:r>
+              <a:rPr lang="en-US" sz="1100" b="1" kern="0" spc="400" dirty="0">
                 <a:solidFill>
                   <a:srgbClr val="DC822E"/>
                 </a:solidFill>
@@ -5233,7 +5097,7 @@
           <a:bodyPr wrap="square" lIns="0" tIns="0" rIns="0" bIns="0" rtlCol="0" anchor="t"/>
           <a:lstStyle/>
           <a:p>
-            <a:pPr indent="0" marL="0">
+            <a:pPr marL="0" indent="0">
               <a:buNone/>
             </a:pPr>
             <a:r>
@@ -5277,6 +5141,13 @@
             <a:prstDash val="solid"/>
           </a:ln>
         </p:spPr>
+        <p:txBody>
+          <a:bodyPr/>
+          <a:lstStyle/>
+          <a:p>
+            <a:endParaRPr lang="de-CH"/>
+          </a:p>
+        </p:txBody>
       </p:sp>
       <p:sp>
         <p:nvSpPr>
@@ -5299,7 +5170,7 @@
           <a:bodyPr wrap="square" lIns="0" tIns="0" rIns="0" bIns="0" rtlCol="0" anchor="ctr"/>
           <a:lstStyle/>
           <a:p>
-            <a:pPr algn="ctr" indent="0" marL="0">
+            <a:pPr marL="0" indent="0" algn="ctr">
               <a:buNone/>
             </a:pPr>
             <a:r>
@@ -5338,7 +5209,7 @@
           <a:bodyPr wrap="square" lIns="0" tIns="0" rIns="0" bIns="0" rtlCol="0" anchor="ctr"/>
           <a:lstStyle/>
           <a:p>
-            <a:pPr indent="0" marL="0">
+            <a:pPr marL="0" indent="0">
               <a:buNone/>
             </a:pPr>
             <a:r>
@@ -5382,6 +5253,13 @@
             <a:prstDash val="solid"/>
           </a:ln>
         </p:spPr>
+        <p:txBody>
+          <a:bodyPr/>
+          <a:lstStyle/>
+          <a:p>
+            <a:endParaRPr lang="de-CH"/>
+          </a:p>
+        </p:txBody>
       </p:sp>
       <p:sp>
         <p:nvSpPr>
@@ -5404,7 +5282,7 @@
           <a:bodyPr wrap="square" lIns="0" tIns="0" rIns="0" bIns="0" rtlCol="0" anchor="ctr"/>
           <a:lstStyle/>
           <a:p>
-            <a:pPr algn="ctr" indent="0" marL="0">
+            <a:pPr marL="0" indent="0" algn="ctr">
               <a:buNone/>
             </a:pPr>
             <a:r>
@@ -5443,7 +5321,7 @@
           <a:bodyPr wrap="square" lIns="0" tIns="0" rIns="0" bIns="0" rtlCol="0" anchor="ctr"/>
           <a:lstStyle/>
           <a:p>
-            <a:pPr indent="0" marL="0">
+            <a:pPr marL="0" indent="0">
               <a:buNone/>
             </a:pPr>
             <a:r>
@@ -5487,6 +5365,13 @@
             <a:prstDash val="solid"/>
           </a:ln>
         </p:spPr>
+        <p:txBody>
+          <a:bodyPr/>
+          <a:lstStyle/>
+          <a:p>
+            <a:endParaRPr lang="de-CH"/>
+          </a:p>
+        </p:txBody>
       </p:sp>
       <p:sp>
         <p:nvSpPr>
@@ -5509,7 +5394,7 @@
           <a:bodyPr wrap="square" lIns="0" tIns="0" rIns="0" bIns="0" rtlCol="0" anchor="ctr"/>
           <a:lstStyle/>
           <a:p>
-            <a:pPr algn="ctr" indent="0" marL="0">
+            <a:pPr marL="0" indent="0" algn="ctr">
               <a:buNone/>
             </a:pPr>
             <a:r>
@@ -5548,7 +5433,7 @@
           <a:bodyPr wrap="square" lIns="0" tIns="0" rIns="0" bIns="0" rtlCol="0" anchor="ctr"/>
           <a:lstStyle/>
           <a:p>
-            <a:pPr indent="0" marL="0">
+            <a:pPr marL="0" indent="0">
               <a:buNone/>
             </a:pPr>
             <a:r>
@@ -5592,6 +5477,13 @@
             <a:prstDash val="solid"/>
           </a:ln>
         </p:spPr>
+        <p:txBody>
+          <a:bodyPr/>
+          <a:lstStyle/>
+          <a:p>
+            <a:endParaRPr lang="de-CH"/>
+          </a:p>
+        </p:txBody>
       </p:sp>
       <p:sp>
         <p:nvSpPr>
@@ -5614,7 +5506,7 @@
           <a:bodyPr wrap="square" lIns="0" tIns="0" rIns="0" bIns="0" rtlCol="0" anchor="ctr"/>
           <a:lstStyle/>
           <a:p>
-            <a:pPr algn="ctr" indent="0" marL="0">
+            <a:pPr marL="0" indent="0" algn="ctr">
               <a:buNone/>
             </a:pPr>
             <a:r>
@@ -5653,7 +5545,7 @@
           <a:bodyPr wrap="square" lIns="0" tIns="0" rIns="0" bIns="0" rtlCol="0" anchor="ctr"/>
           <a:lstStyle/>
           <a:p>
-            <a:pPr indent="0" marL="0">
+            <a:pPr marL="0" indent="0">
               <a:buNone/>
             </a:pPr>
             <a:r>
@@ -5692,11 +5584,11 @@
           <a:bodyPr wrap="square" rtlCol="0" anchor="ctr"/>
           <a:lstStyle/>
           <a:p>
-            <a:pPr indent="0" marL="0">
-              <a:buNone/>
-            </a:pPr>
-            <a:r>
-              <a:rPr lang="en-US" sz="900" spc="200" kern="0" dirty="0">
+            <a:pPr marL="0" indent="0">
+              <a:buNone/>
+            </a:pPr>
+            <a:r>
+              <a:rPr lang="en-US" sz="900" kern="0" spc="200" dirty="0">
                 <a:solidFill>
                   <a:srgbClr val="F1ECDD"/>
                 </a:solidFill>
@@ -5731,7 +5623,7 @@
           <a:bodyPr wrap="square" rtlCol="0" anchor="ctr"/>
           <a:lstStyle/>
           <a:p>
-            <a:pPr algn="r" indent="0" marL="0">
+            <a:pPr marL="0" indent="0" algn="r">
               <a:buNone/>
             </a:pPr>
             <a:r>
@@ -6050,4 +5942,319 @@
     </a:ext>
   </a:extLst>
 </a:theme>
+</file>
+
+<file path=ppt/theme/theme2.xml><?xml version="1.0" encoding="utf-8"?>
+<a:theme xmlns:a="http://schemas.openxmlformats.org/drawingml/2006/main" name="Office">
+  <a:themeElements>
+    <a:clrScheme name="Office">
+      <a:dk1>
+        <a:sysClr val="windowText" lastClr="000000"/>
+      </a:dk1>
+      <a:lt1>
+        <a:sysClr val="window" lastClr="FFFFFF"/>
+      </a:lt1>
+      <a:dk2>
+        <a:srgbClr val="0E2841"/>
+      </a:dk2>
+      <a:lt2>
+        <a:srgbClr val="E8E8E8"/>
+      </a:lt2>
+      <a:accent1>
+        <a:srgbClr val="156082"/>
+      </a:accent1>
+      <a:accent2>
+        <a:srgbClr val="E97132"/>
+      </a:accent2>
+      <a:accent3>
+        <a:srgbClr val="196B24"/>
+      </a:accent3>
+      <a:accent4>
+        <a:srgbClr val="0F9ED5"/>
+      </a:accent4>
+      <a:accent5>
+        <a:srgbClr val="A02B93"/>
+      </a:accent5>
+      <a:accent6>
+        <a:srgbClr val="4EA72E"/>
+      </a:accent6>
+      <a:hlink>
+        <a:srgbClr val="467886"/>
+      </a:hlink>
+      <a:folHlink>
+        <a:srgbClr val="96607D"/>
+      </a:folHlink>
+    </a:clrScheme>
+    <a:fontScheme name="Office">
+      <a:majorFont>
+        <a:latin typeface="Aptos Display" panose="02110004020202020204"/>
+        <a:ea typeface=""/>
+        <a:cs typeface=""/>
+        <a:font script="Jpan" typeface="游ゴシック Light"/>
+        <a:font script="Hang" typeface="맑은 고딕"/>
+        <a:font script="Hans" typeface="等线 Light"/>
+        <a:font script="Hant" typeface="新細明體"/>
+        <a:font script="Arab" typeface="Times New Roman"/>
+        <a:font script="Hebr" typeface="Times New Roman"/>
+        <a:font script="Thai" typeface="Angsana New"/>
+        <a:font script="Ethi" typeface="Nyala"/>
+        <a:font script="Beng" typeface="Vrinda"/>
+        <a:font script="Gujr" typeface="Shruti"/>
+        <a:font script="Khmr" typeface="MoolBoran"/>
+        <a:font script="Knda" typeface="Tunga"/>
+        <a:font script="Guru" typeface="Raavi"/>
+        <a:font script="Cans" typeface="Euphemia"/>
+        <a:font script="Cher" typeface="Plantagenet Cherokee"/>
+        <a:font script="Yiii" typeface="Microsoft Yi Baiti"/>
+        <a:font script="Tibt" typeface="Microsoft Himalaya"/>
+        <a:font script="Thaa" typeface="MV Boli"/>
+        <a:font script="Deva" typeface="Mangal"/>
+        <a:font script="Telu" typeface="Gautami"/>
+        <a:font script="Taml" typeface="Latha"/>
+        <a:font script="Syrc" typeface="Estrangelo Edessa"/>
+        <a:font script="Orya" typeface="Kalinga"/>
+        <a:font script="Mlym" typeface="Kartika"/>
+        <a:font script="Laoo" typeface="DokChampa"/>
+        <a:font script="Sinh" typeface="Iskoola Pota"/>
+        <a:font script="Mong" typeface="Mongolian Baiti"/>
+        <a:font script="Viet" typeface="Times New Roman"/>
+        <a:font script="Uigh" typeface="Microsoft Uighur"/>
+        <a:font script="Geor" typeface="Sylfaen"/>
+        <a:font script="Armn" typeface="Arial"/>
+        <a:font script="Bugi" typeface="Leelawadee UI"/>
+        <a:font script="Bopo" typeface="Microsoft JhengHei"/>
+        <a:font script="Java" typeface="Javanese Text"/>
+        <a:font script="Lisu" typeface="Segoe UI"/>
+        <a:font script="Mymr" typeface="Myanmar Text"/>
+        <a:font script="Nkoo" typeface="Ebrima"/>
+        <a:font script="Olck" typeface="Nirmala UI"/>
+        <a:font script="Osma" typeface="Ebrima"/>
+        <a:font script="Phag" typeface="Phagspa"/>
+        <a:font script="Syrn" typeface="Estrangelo Edessa"/>
+        <a:font script="Syrj" typeface="Estrangelo Edessa"/>
+        <a:font script="Syre" typeface="Estrangelo Edessa"/>
+        <a:font script="Sora" typeface="Nirmala UI"/>
+        <a:font script="Tale" typeface="Microsoft Tai Le"/>
+        <a:font script="Talu" typeface="Microsoft New Tai Lue"/>
+        <a:font script="Tfng" typeface="Ebrima"/>
+      </a:majorFont>
+      <a:minorFont>
+        <a:latin typeface="Aptos" panose="02110004020202020204"/>
+        <a:ea typeface=""/>
+        <a:cs typeface=""/>
+        <a:font script="Jpan" typeface="游ゴシック"/>
+        <a:font script="Hang" typeface="맑은 고딕"/>
+        <a:font script="Hans" typeface="等线"/>
+        <a:font script="Hant" typeface="新細明體"/>
+        <a:font script="Arab" typeface="Arial"/>
+        <a:font script="Hebr" typeface="Arial"/>
+        <a:font script="Thai" typeface="Cordia New"/>
+        <a:font script="Ethi" typeface="Nyala"/>
+        <a:font script="Beng" typeface="Vrinda"/>
+        <a:font script="Gujr" typeface="Shruti"/>
+        <a:font script="Khmr" typeface="DaunPenh"/>
+        <a:font script="Knda" typeface="Tunga"/>
+        <a:font script="Guru" typeface="Raavi"/>
+        <a:font script="Cans" typeface="Euphemia"/>
+        <a:font script="Cher" typeface="Plantagenet Cherokee"/>
+        <a:font script="Yiii" typeface="Microsoft Yi Baiti"/>
+        <a:font script="Tibt" typeface="Microsoft Himalaya"/>
+        <a:font script="Thaa" typeface="MV Boli"/>
+        <a:font script="Deva" typeface="Mangal"/>
+        <a:font script="Telu" typeface="Gautami"/>
+        <a:font script="Taml" typeface="Latha"/>
+        <a:font script="Syrc" typeface="Estrangelo Edessa"/>
+        <a:font script="Orya" typeface="Kalinga"/>
+        <a:font script="Mlym" typeface="Kartika"/>
+        <a:font script="Laoo" typeface="DokChampa"/>
+        <a:font script="Sinh" typeface="Iskoola Pota"/>
+        <a:font script="Mong" typeface="Mongolian Baiti"/>
+        <a:font script="Viet" typeface="Arial"/>
+        <a:font script="Uigh" typeface="Microsoft Uighur"/>
+        <a:font script="Geor" typeface="Sylfaen"/>
+        <a:font script="Armn" typeface="Arial"/>
+        <a:font script="Bugi" typeface="Leelawadee UI"/>
+        <a:font script="Bopo" typeface="Microsoft JhengHei"/>
+        <a:font script="Java" typeface="Javanese Text"/>
+        <a:font script="Lisu" typeface="Segoe UI"/>
+        <a:font script="Mymr" typeface="Myanmar Text"/>
+        <a:font script="Nkoo" typeface="Ebrima"/>
+        <a:font script="Olck" typeface="Nirmala UI"/>
+        <a:font script="Osma" typeface="Ebrima"/>
+        <a:font script="Phag" typeface="Phagspa"/>
+        <a:font script="Syrn" typeface="Estrangelo Edessa"/>
+        <a:font script="Syrj" typeface="Estrangelo Edessa"/>
+        <a:font script="Syre" typeface="Estrangelo Edessa"/>
+        <a:font script="Sora" typeface="Nirmala UI"/>
+        <a:font script="Tale" typeface="Microsoft Tai Le"/>
+        <a:font script="Talu" typeface="Microsoft New Tai Lue"/>
+        <a:font script="Tfng" typeface="Ebrima"/>
+      </a:minorFont>
+    </a:fontScheme>
+    <a:fmtScheme name="Office">
+      <a:fillStyleLst>
+        <a:solidFill>
+          <a:schemeClr val="phClr"/>
+        </a:solidFill>
+        <a:gradFill rotWithShape="1">
+          <a:gsLst>
+            <a:gs pos="0">
+              <a:schemeClr val="phClr">
+                <a:lumMod val="110000"/>
+                <a:satMod val="105000"/>
+                <a:tint val="67000"/>
+              </a:schemeClr>
+            </a:gs>
+            <a:gs pos="50000">
+              <a:schemeClr val="phClr">
+                <a:lumMod val="105000"/>
+                <a:satMod val="103000"/>
+                <a:tint val="73000"/>
+              </a:schemeClr>
+            </a:gs>
+            <a:gs pos="100000">
+              <a:schemeClr val="phClr">
+                <a:lumMod val="105000"/>
+                <a:satMod val="109000"/>
+                <a:tint val="81000"/>
+              </a:schemeClr>
+            </a:gs>
+          </a:gsLst>
+          <a:lin ang="5400000" scaled="0"/>
+        </a:gradFill>
+        <a:gradFill rotWithShape="1">
+          <a:gsLst>
+            <a:gs pos="0">
+              <a:schemeClr val="phClr">
+                <a:satMod val="103000"/>
+                <a:lumMod val="102000"/>
+                <a:tint val="94000"/>
+              </a:schemeClr>
+            </a:gs>
+            <a:gs pos="50000">
+              <a:schemeClr val="phClr">
+                <a:satMod val="110000"/>
+                <a:lumMod val="100000"/>
+                <a:shade val="100000"/>
+              </a:schemeClr>
+            </a:gs>
+            <a:gs pos="100000">
+              <a:schemeClr val="phClr">
+                <a:lumMod val="99000"/>
+                <a:satMod val="120000"/>
+                <a:shade val="78000"/>
+              </a:schemeClr>
+            </a:gs>
+          </a:gsLst>
+          <a:lin ang="5400000" scaled="0"/>
+        </a:gradFill>
+      </a:fillStyleLst>
+      <a:lnStyleLst>
+        <a:ln w="12700" cap="flat" cmpd="sng" algn="ctr">
+          <a:solidFill>
+            <a:schemeClr val="phClr"/>
+          </a:solidFill>
+          <a:prstDash val="solid"/>
+          <a:miter lim="800000"/>
+        </a:ln>
+        <a:ln w="19050" cap="flat" cmpd="sng" algn="ctr">
+          <a:solidFill>
+            <a:schemeClr val="phClr"/>
+          </a:solidFill>
+          <a:prstDash val="solid"/>
+          <a:miter lim="800000"/>
+        </a:ln>
+        <a:ln w="25400" cap="flat" cmpd="sng" algn="ctr">
+          <a:solidFill>
+            <a:schemeClr val="phClr"/>
+          </a:solidFill>
+          <a:prstDash val="solid"/>
+          <a:miter lim="800000"/>
+        </a:ln>
+      </a:lnStyleLst>
+      <a:effectStyleLst>
+        <a:effectStyle>
+          <a:effectLst/>
+        </a:effectStyle>
+        <a:effectStyle>
+          <a:effectLst/>
+        </a:effectStyle>
+        <a:effectStyle>
+          <a:effectLst>
+            <a:outerShdw blurRad="57150" dist="19050" dir="5400000" algn="ctr" rotWithShape="0">
+              <a:srgbClr val="000000">
+                <a:alpha val="63000"/>
+              </a:srgbClr>
+            </a:outerShdw>
+          </a:effectLst>
+        </a:effectStyle>
+      </a:effectStyleLst>
+      <a:bgFillStyleLst>
+        <a:solidFill>
+          <a:schemeClr val="phClr"/>
+        </a:solidFill>
+        <a:solidFill>
+          <a:schemeClr val="phClr">
+            <a:tint val="95000"/>
+            <a:satMod val="170000"/>
+          </a:schemeClr>
+        </a:solidFill>
+        <a:gradFill rotWithShape="1">
+          <a:gsLst>
+            <a:gs pos="0">
+              <a:schemeClr val="phClr">
+                <a:tint val="93000"/>
+                <a:satMod val="150000"/>
+                <a:shade val="98000"/>
+                <a:lumMod val="102000"/>
+              </a:schemeClr>
+            </a:gs>
+            <a:gs pos="50000">
+              <a:schemeClr val="phClr">
+                <a:tint val="98000"/>
+                <a:satMod val="130000"/>
+                <a:shade val="90000"/>
+                <a:lumMod val="103000"/>
+              </a:schemeClr>
+            </a:gs>
+            <a:gs pos="100000">
+              <a:schemeClr val="phClr">
+                <a:shade val="63000"/>
+                <a:satMod val="120000"/>
+              </a:schemeClr>
+            </a:gs>
+          </a:gsLst>
+          <a:lin ang="5400000" scaled="0"/>
+        </a:gradFill>
+      </a:bgFillStyleLst>
+    </a:fmtScheme>
+  </a:themeElements>
+  <a:objectDefaults>
+    <a:lnDef>
+      <a:spPr/>
+      <a:bodyPr/>
+      <a:lstStyle/>
+      <a:style>
+        <a:lnRef idx="2">
+          <a:schemeClr val="accent1"/>
+        </a:lnRef>
+        <a:fillRef idx="0">
+          <a:schemeClr val="accent1"/>
+        </a:fillRef>
+        <a:effectRef idx="1">
+          <a:schemeClr val="accent1"/>
+        </a:effectRef>
+        <a:fontRef idx="minor">
+          <a:schemeClr val="tx1"/>
+        </a:fontRef>
+      </a:style>
+    </a:lnDef>
+  </a:objectDefaults>
+  <a:extraClrSchemeLst/>
+  <a:extLst>
+    <a:ext uri="{05A4C25C-085E-4340-85A3-A5531E510DB2}">
+      <thm15:themeFamily xmlns:thm15="http://schemas.microsoft.com/office/thememl/2012/main" name="Office Theme" id="{2E142A2C-CD16-42D6-873A-C26D2A0506FA}" vid="{1BDDFF52-6CD6-40A5-AB3C-68EB2F1E4D0A}"/>
+    </a:ext>
+  </a:extLst>
+</a:theme>
 </file>